--- a/docs/Sistema de Detecção de Anomalias para Monitoramento Ambiental.pptx
+++ b/docs/Sistema de Detecção de Anomalias para Monitoramento Ambiental.pptx
@@ -163,7 +163,7 @@
           </a:lstStyle>
           <a:p>
             <a:r>
-              <a:rPr lang="pt-BR" smtClean="0"/>
+              <a:rPr lang="pt-BR"/>
               <a:t>Clique para editar o título mestre</a:t>
             </a:r>
             <a:endParaRPr lang="en-US" dirty="0"/>
@@ -280,7 +280,7 @@
           </a:lstStyle>
           <a:p>
             <a:r>
-              <a:rPr lang="pt-BR" smtClean="0"/>
+              <a:rPr lang="pt-BR"/>
               <a:t>Clique para editar o estilo do subtítulo Mestre</a:t>
             </a:r>
             <a:endParaRPr lang="en-US" dirty="0"/>
@@ -304,7 +304,7 @@
           <a:p>
             <a:fld id="{1C5E47A1-8007-4E5F-A68B-E6F49FDD3CAA}" type="datetimeFigureOut">
               <a:rPr lang="pt-BR" smtClean="0"/>
-              <a:t>25/02/2026</a:t>
+              <a:t>26/02/2026</a:t>
             </a:fld>
             <a:endParaRPr lang="pt-BR"/>
           </a:p>
@@ -409,7 +409,7 @@
           </a:lstStyle>
           <a:p>
             <a:r>
-              <a:rPr lang="pt-BR" smtClean="0"/>
+              <a:rPr lang="pt-BR"/>
               <a:t>Clique para editar o título mestre</a:t>
             </a:r>
             <a:endParaRPr lang="en-US" dirty="0"/>
@@ -488,7 +488,7 @@
           </a:lstStyle>
           <a:p>
             <a:r>
-              <a:rPr lang="pt-BR" smtClean="0"/>
+              <a:rPr lang="pt-BR"/>
               <a:t>Clique no ícone para adicionar uma imagem</a:t>
             </a:r>
             <a:endParaRPr lang="en-US" dirty="0"/>
@@ -556,7 +556,7 @@
           <a:p>
             <a:pPr lvl="0"/>
             <a:r>
-              <a:rPr lang="pt-BR" smtClean="0"/>
+              <a:rPr lang="pt-BR"/>
               <a:t>Editar estilos de texto Mestre</a:t>
             </a:r>
           </a:p>
@@ -579,7 +579,7 @@
           <a:p>
             <a:fld id="{1C5E47A1-8007-4E5F-A68B-E6F49FDD3CAA}" type="datetimeFigureOut">
               <a:rPr lang="pt-BR" smtClean="0"/>
-              <a:t>25/02/2026</a:t>
+              <a:t>26/02/2026</a:t>
             </a:fld>
             <a:endParaRPr lang="pt-BR"/>
           </a:p>
@@ -682,7 +682,7 @@
           </a:lstStyle>
           <a:p>
             <a:r>
-              <a:rPr lang="pt-BR" smtClean="0"/>
+              <a:rPr lang="pt-BR"/>
               <a:t>Clique para editar o título mestre</a:t>
             </a:r>
             <a:endParaRPr lang="en-US" dirty="0"/>
@@ -750,7 +750,7 @@
           <a:p>
             <a:pPr lvl="0"/>
             <a:r>
-              <a:rPr lang="pt-BR" smtClean="0"/>
+              <a:rPr lang="pt-BR"/>
               <a:t>Editar estilos de texto Mestre</a:t>
             </a:r>
           </a:p>
@@ -773,7 +773,7 @@
           <a:p>
             <a:fld id="{1C5E47A1-8007-4E5F-A68B-E6F49FDD3CAA}" type="datetimeFigureOut">
               <a:rPr lang="pt-BR" smtClean="0"/>
-              <a:t>25/02/2026</a:t>
+              <a:t>26/02/2026</a:t>
             </a:fld>
             <a:endParaRPr lang="pt-BR"/>
           </a:p>
@@ -876,7 +876,7 @@
           </a:lstStyle>
           <a:p>
             <a:r>
-              <a:rPr lang="pt-BR" smtClean="0"/>
+              <a:rPr lang="pt-BR"/>
               <a:t>Clique para editar o título mestre</a:t>
             </a:r>
             <a:endParaRPr lang="en-US" dirty="0"/>
@@ -951,7 +951,7 @@
           <a:p>
             <a:pPr lvl="0"/>
             <a:r>
-              <a:rPr lang="pt-BR" smtClean="0"/>
+              <a:rPr lang="pt-BR"/>
               <a:t>Editar estilos de texto Mestre</a:t>
             </a:r>
           </a:p>
@@ -1018,7 +1018,7 @@
           <a:p>
             <a:pPr lvl="0"/>
             <a:r>
-              <a:rPr lang="pt-BR" smtClean="0"/>
+              <a:rPr lang="pt-BR"/>
               <a:t>Editar estilos de texto Mestre</a:t>
             </a:r>
           </a:p>
@@ -1041,7 +1041,7 @@
           <a:p>
             <a:fld id="{1C5E47A1-8007-4E5F-A68B-E6F49FDD3CAA}" type="datetimeFigureOut">
               <a:rPr lang="pt-BR" smtClean="0"/>
-              <a:t>25/02/2026</a:t>
+              <a:t>26/02/2026</a:t>
             </a:fld>
             <a:endParaRPr lang="pt-BR"/>
           </a:p>
@@ -1232,7 +1232,7 @@
           </a:lstStyle>
           <a:p>
             <a:r>
-              <a:rPr lang="pt-BR" smtClean="0"/>
+              <a:rPr lang="pt-BR"/>
               <a:t>Clique para editar o título mestre</a:t>
             </a:r>
             <a:endParaRPr lang="en-US" dirty="0"/>
@@ -1350,7 +1350,7 @@
           <a:p>
             <a:pPr lvl="0"/>
             <a:r>
-              <a:rPr lang="pt-BR" smtClean="0"/>
+              <a:rPr lang="pt-BR"/>
               <a:t>Editar estilos de texto Mestre</a:t>
             </a:r>
           </a:p>
@@ -1373,7 +1373,7 @@
           <a:p>
             <a:fld id="{1C5E47A1-8007-4E5F-A68B-E6F49FDD3CAA}" type="datetimeFigureOut">
               <a:rPr lang="pt-BR" smtClean="0"/>
-              <a:t>25/02/2026</a:t>
+              <a:t>26/02/2026</a:t>
             </a:fld>
             <a:endParaRPr lang="pt-BR"/>
           </a:p>
@@ -1471,7 +1471,7 @@
           </a:lstStyle>
           <a:p>
             <a:r>
-              <a:rPr lang="pt-BR" smtClean="0"/>
+              <a:rPr lang="pt-BR"/>
               <a:t>Clique para editar o título mestre</a:t>
             </a:r>
             <a:endParaRPr lang="en-US" dirty="0"/>
@@ -1543,7 +1543,7 @@
           <a:p>
             <a:pPr lvl="0"/>
             <a:r>
-              <a:rPr lang="pt-BR" smtClean="0"/>
+              <a:rPr lang="pt-BR"/>
               <a:t>Editar estilos de texto Mestre</a:t>
             </a:r>
           </a:p>
@@ -1610,7 +1610,7 @@
           <a:p>
             <a:pPr lvl="0"/>
             <a:r>
-              <a:rPr lang="pt-BR" smtClean="0"/>
+              <a:rPr lang="pt-BR"/>
               <a:t>Editar estilos de texto Mestre</a:t>
             </a:r>
           </a:p>
@@ -1681,7 +1681,7 @@
           <a:p>
             <a:pPr lvl="0"/>
             <a:r>
-              <a:rPr lang="pt-BR" smtClean="0"/>
+              <a:rPr lang="pt-BR"/>
               <a:t>Editar estilos de texto Mestre</a:t>
             </a:r>
           </a:p>
@@ -1748,7 +1748,7 @@
           <a:p>
             <a:pPr lvl="0"/>
             <a:r>
-              <a:rPr lang="pt-BR" smtClean="0"/>
+              <a:rPr lang="pt-BR"/>
               <a:t>Editar estilos de texto Mestre</a:t>
             </a:r>
           </a:p>
@@ -1819,7 +1819,7 @@
           <a:p>
             <a:pPr lvl="0"/>
             <a:r>
-              <a:rPr lang="pt-BR" smtClean="0"/>
+              <a:rPr lang="pt-BR"/>
               <a:t>Editar estilos de texto Mestre</a:t>
             </a:r>
           </a:p>
@@ -1886,7 +1886,7 @@
           <a:p>
             <a:pPr lvl="0"/>
             <a:r>
-              <a:rPr lang="pt-BR" smtClean="0"/>
+              <a:rPr lang="pt-BR"/>
               <a:t>Editar estilos de texto Mestre</a:t>
             </a:r>
           </a:p>
@@ -1983,7 +1983,7 @@
           <a:p>
             <a:fld id="{1C5E47A1-8007-4E5F-A68B-E6F49FDD3CAA}" type="datetimeFigureOut">
               <a:rPr lang="pt-BR" smtClean="0"/>
-              <a:t>25/02/2026</a:t>
+              <a:t>26/02/2026</a:t>
             </a:fld>
             <a:endParaRPr lang="pt-BR"/>
           </a:p>
@@ -2081,7 +2081,7 @@
           </a:lstStyle>
           <a:p>
             <a:r>
-              <a:rPr lang="pt-BR" smtClean="0"/>
+              <a:rPr lang="pt-BR"/>
               <a:t>Clique para editar o título mestre</a:t>
             </a:r>
             <a:endParaRPr lang="en-US" dirty="0"/>
@@ -2153,7 +2153,7 @@
           <a:p>
             <a:pPr lvl="0"/>
             <a:r>
-              <a:rPr lang="pt-BR" smtClean="0"/>
+              <a:rPr lang="pt-BR"/>
               <a:t>Editar estilos de texto Mestre</a:t>
             </a:r>
           </a:p>
@@ -2231,7 +2231,7 @@
           </a:lstStyle>
           <a:p>
             <a:r>
-              <a:rPr lang="pt-BR" smtClean="0"/>
+              <a:rPr lang="pt-BR"/>
               <a:t>Clique no ícone para adicionar uma imagem</a:t>
             </a:r>
             <a:endParaRPr lang="en-US" dirty="0"/>
@@ -2299,7 +2299,7 @@
           <a:p>
             <a:pPr lvl="0"/>
             <a:r>
-              <a:rPr lang="pt-BR" smtClean="0"/>
+              <a:rPr lang="pt-BR"/>
               <a:t>Editar estilos de texto Mestre</a:t>
             </a:r>
           </a:p>
@@ -2370,7 +2370,7 @@
           <a:p>
             <a:pPr lvl="0"/>
             <a:r>
-              <a:rPr lang="pt-BR" smtClean="0"/>
+              <a:rPr lang="pt-BR"/>
               <a:t>Editar estilos de texto Mestre</a:t>
             </a:r>
           </a:p>
@@ -2448,7 +2448,7 @@
           </a:lstStyle>
           <a:p>
             <a:r>
-              <a:rPr lang="pt-BR" smtClean="0"/>
+              <a:rPr lang="pt-BR"/>
               <a:t>Clique no ícone para adicionar uma imagem</a:t>
             </a:r>
             <a:endParaRPr lang="en-US" dirty="0"/>
@@ -2516,7 +2516,7 @@
           <a:p>
             <a:pPr lvl="0"/>
             <a:r>
-              <a:rPr lang="pt-BR" smtClean="0"/>
+              <a:rPr lang="pt-BR"/>
               <a:t>Editar estilos de texto Mestre</a:t>
             </a:r>
           </a:p>
@@ -2587,7 +2587,7 @@
           <a:p>
             <a:pPr lvl="0"/>
             <a:r>
-              <a:rPr lang="pt-BR" smtClean="0"/>
+              <a:rPr lang="pt-BR"/>
               <a:t>Editar estilos de texto Mestre</a:t>
             </a:r>
           </a:p>
@@ -2665,7 +2665,7 @@
           </a:lstStyle>
           <a:p>
             <a:r>
-              <a:rPr lang="pt-BR" smtClean="0"/>
+              <a:rPr lang="pt-BR"/>
               <a:t>Clique no ícone para adicionar uma imagem</a:t>
             </a:r>
             <a:endParaRPr lang="en-US" dirty="0"/>
@@ -2733,7 +2733,7 @@
           <a:p>
             <a:pPr lvl="0"/>
             <a:r>
-              <a:rPr lang="pt-BR" smtClean="0"/>
+              <a:rPr lang="pt-BR"/>
               <a:t>Editar estilos de texto Mestre</a:t>
             </a:r>
           </a:p>
@@ -2830,7 +2830,7 @@
           <a:p>
             <a:fld id="{1C5E47A1-8007-4E5F-A68B-E6F49FDD3CAA}" type="datetimeFigureOut">
               <a:rPr lang="pt-BR" smtClean="0"/>
-              <a:t>25/02/2026</a:t>
+              <a:t>26/02/2026</a:t>
             </a:fld>
             <a:endParaRPr lang="pt-BR"/>
           </a:p>
@@ -2924,7 +2924,7 @@
           <a:lstStyle/>
           <a:p>
             <a:r>
-              <a:rPr lang="pt-BR" smtClean="0"/>
+              <a:rPr lang="pt-BR"/>
               <a:t>Clique para editar o título mestre</a:t>
             </a:r>
             <a:endParaRPr lang="en-US" dirty="0"/>
@@ -2948,35 +2948,35 @@
           <a:p>
             <a:pPr lvl="0"/>
             <a:r>
-              <a:rPr lang="pt-BR" smtClean="0"/>
+              <a:rPr lang="pt-BR"/>
               <a:t>Editar estilos de texto Mestre</a:t>
             </a:r>
           </a:p>
           <a:p>
             <a:pPr lvl="1"/>
             <a:r>
-              <a:rPr lang="pt-BR" smtClean="0"/>
+              <a:rPr lang="pt-BR"/>
               <a:t>Segundo nível</a:t>
             </a:r>
           </a:p>
           <a:p>
             <a:pPr lvl="2"/>
             <a:r>
-              <a:rPr lang="pt-BR" smtClean="0"/>
+              <a:rPr lang="pt-BR"/>
               <a:t>Terceiro nível</a:t>
             </a:r>
           </a:p>
           <a:p>
             <a:pPr lvl="3"/>
             <a:r>
-              <a:rPr lang="pt-BR" smtClean="0"/>
+              <a:rPr lang="pt-BR"/>
               <a:t>Quarto nível</a:t>
             </a:r>
           </a:p>
           <a:p>
             <a:pPr lvl="4"/>
             <a:r>
-              <a:rPr lang="pt-BR" smtClean="0"/>
+              <a:rPr lang="pt-BR"/>
               <a:t>Quinto nível</a:t>
             </a:r>
             <a:endParaRPr lang="en-US" dirty="0"/>
@@ -3000,7 +3000,7 @@
           <a:p>
             <a:fld id="{1C5E47A1-8007-4E5F-A68B-E6F49FDD3CAA}" type="datetimeFigureOut">
               <a:rPr lang="pt-BR" smtClean="0"/>
-              <a:t>25/02/2026</a:t>
+              <a:t>26/02/2026</a:t>
             </a:fld>
             <a:endParaRPr lang="pt-BR"/>
           </a:p>
@@ -3099,7 +3099,7 @@
           <a:lstStyle/>
           <a:p>
             <a:r>
-              <a:rPr lang="pt-BR" smtClean="0"/>
+              <a:rPr lang="pt-BR"/>
               <a:t>Clique para editar o título mestre</a:t>
             </a:r>
             <a:endParaRPr lang="en-US" dirty="0"/>
@@ -3128,35 +3128,35 @@
           <a:p>
             <a:pPr lvl="0"/>
             <a:r>
-              <a:rPr lang="pt-BR" smtClean="0"/>
+              <a:rPr lang="pt-BR"/>
               <a:t>Editar estilos de texto Mestre</a:t>
             </a:r>
           </a:p>
           <a:p>
             <a:pPr lvl="1"/>
             <a:r>
-              <a:rPr lang="pt-BR" smtClean="0"/>
+              <a:rPr lang="pt-BR"/>
               <a:t>Segundo nível</a:t>
             </a:r>
           </a:p>
           <a:p>
             <a:pPr lvl="2"/>
             <a:r>
-              <a:rPr lang="pt-BR" smtClean="0"/>
+              <a:rPr lang="pt-BR"/>
               <a:t>Terceiro nível</a:t>
             </a:r>
           </a:p>
           <a:p>
             <a:pPr lvl="3"/>
             <a:r>
-              <a:rPr lang="pt-BR" smtClean="0"/>
+              <a:rPr lang="pt-BR"/>
               <a:t>Quarto nível</a:t>
             </a:r>
           </a:p>
           <a:p>
             <a:pPr lvl="4"/>
             <a:r>
-              <a:rPr lang="pt-BR" smtClean="0"/>
+              <a:rPr lang="pt-BR"/>
               <a:t>Quinto nível</a:t>
             </a:r>
             <a:endParaRPr lang="en-US" dirty="0"/>
@@ -3180,7 +3180,7 @@
           <a:p>
             <a:fld id="{1C5E47A1-8007-4E5F-A68B-E6F49FDD3CAA}" type="datetimeFigureOut">
               <a:rPr lang="pt-BR" smtClean="0"/>
-              <a:t>25/02/2026</a:t>
+              <a:t>26/02/2026</a:t>
             </a:fld>
             <a:endParaRPr lang="pt-BR"/>
           </a:p>
@@ -3274,7 +3274,7 @@
           <a:lstStyle/>
           <a:p>
             <a:r>
-              <a:rPr lang="pt-BR" smtClean="0"/>
+              <a:rPr lang="pt-BR"/>
               <a:t>Clique para editar o título mestre</a:t>
             </a:r>
             <a:endParaRPr lang="en-US" dirty="0"/>
@@ -3298,35 +3298,35 @@
           <a:p>
             <a:pPr lvl="0"/>
             <a:r>
-              <a:rPr lang="pt-BR" smtClean="0"/>
+              <a:rPr lang="pt-BR"/>
               <a:t>Editar estilos de texto Mestre</a:t>
             </a:r>
           </a:p>
           <a:p>
             <a:pPr lvl="1"/>
             <a:r>
-              <a:rPr lang="pt-BR" smtClean="0"/>
+              <a:rPr lang="pt-BR"/>
               <a:t>Segundo nível</a:t>
             </a:r>
           </a:p>
           <a:p>
             <a:pPr lvl="2"/>
             <a:r>
-              <a:rPr lang="pt-BR" smtClean="0"/>
+              <a:rPr lang="pt-BR"/>
               <a:t>Terceiro nível</a:t>
             </a:r>
           </a:p>
           <a:p>
             <a:pPr lvl="3"/>
             <a:r>
-              <a:rPr lang="pt-BR" smtClean="0"/>
+              <a:rPr lang="pt-BR"/>
               <a:t>Quarto nível</a:t>
             </a:r>
           </a:p>
           <a:p>
             <a:pPr lvl="4"/>
             <a:r>
-              <a:rPr lang="pt-BR" smtClean="0"/>
+              <a:rPr lang="pt-BR"/>
               <a:t>Quinto nível</a:t>
             </a:r>
             <a:endParaRPr lang="en-US" dirty="0"/>
@@ -3350,7 +3350,7 @@
           <a:p>
             <a:fld id="{1C5E47A1-8007-4E5F-A68B-E6F49FDD3CAA}" type="datetimeFigureOut">
               <a:rPr lang="pt-BR" smtClean="0"/>
-              <a:t>25/02/2026</a:t>
+              <a:t>26/02/2026</a:t>
             </a:fld>
             <a:endParaRPr lang="pt-BR"/>
           </a:p>
@@ -3453,7 +3453,7 @@
           </a:lstStyle>
           <a:p>
             <a:r>
-              <a:rPr lang="pt-BR" smtClean="0"/>
+              <a:rPr lang="pt-BR"/>
               <a:t>Clique para editar o título mestre</a:t>
             </a:r>
             <a:endParaRPr lang="en-US" dirty="0"/>
@@ -3571,7 +3571,7 @@
           <a:p>
             <a:pPr lvl="0"/>
             <a:r>
-              <a:rPr lang="pt-BR" smtClean="0"/>
+              <a:rPr lang="pt-BR"/>
               <a:t>Editar estilos de texto Mestre</a:t>
             </a:r>
           </a:p>
@@ -3594,7 +3594,7 @@
           <a:p>
             <a:fld id="{1C5E47A1-8007-4E5F-A68B-E6F49FDD3CAA}" type="datetimeFigureOut">
               <a:rPr lang="pt-BR" smtClean="0"/>
-              <a:t>25/02/2026</a:t>
+              <a:t>26/02/2026</a:t>
             </a:fld>
             <a:endParaRPr lang="pt-BR"/>
           </a:p>
@@ -3688,7 +3688,7 @@
           <a:lstStyle/>
           <a:p>
             <a:r>
-              <a:rPr lang="pt-BR" smtClean="0"/>
+              <a:rPr lang="pt-BR"/>
               <a:t>Clique para editar o título mestre</a:t>
             </a:r>
             <a:endParaRPr lang="en-US" dirty="0"/>
@@ -3747,35 +3747,35 @@
           <a:p>
             <a:pPr lvl="0"/>
             <a:r>
-              <a:rPr lang="pt-BR" smtClean="0"/>
+              <a:rPr lang="pt-BR"/>
               <a:t>Editar estilos de texto Mestre</a:t>
             </a:r>
           </a:p>
           <a:p>
             <a:pPr lvl="1"/>
             <a:r>
-              <a:rPr lang="pt-BR" smtClean="0"/>
+              <a:rPr lang="pt-BR"/>
               <a:t>Segundo nível</a:t>
             </a:r>
           </a:p>
           <a:p>
             <a:pPr lvl="2"/>
             <a:r>
-              <a:rPr lang="pt-BR" smtClean="0"/>
+              <a:rPr lang="pt-BR"/>
               <a:t>Terceiro nível</a:t>
             </a:r>
           </a:p>
           <a:p>
             <a:pPr lvl="3"/>
             <a:r>
-              <a:rPr lang="pt-BR" smtClean="0"/>
+              <a:rPr lang="pt-BR"/>
               <a:t>Quarto nível</a:t>
             </a:r>
           </a:p>
           <a:p>
             <a:pPr lvl="4"/>
             <a:r>
-              <a:rPr lang="pt-BR" smtClean="0"/>
+              <a:rPr lang="pt-BR"/>
               <a:t>Quinto nível</a:t>
             </a:r>
             <a:endParaRPr lang="en-US" dirty="0"/>
@@ -3834,35 +3834,35 @@
           <a:p>
             <a:pPr lvl="0"/>
             <a:r>
-              <a:rPr lang="pt-BR" smtClean="0"/>
+              <a:rPr lang="pt-BR"/>
               <a:t>Editar estilos de texto Mestre</a:t>
             </a:r>
           </a:p>
           <a:p>
             <a:pPr lvl="1"/>
             <a:r>
-              <a:rPr lang="pt-BR" smtClean="0"/>
+              <a:rPr lang="pt-BR"/>
               <a:t>Segundo nível</a:t>
             </a:r>
           </a:p>
           <a:p>
             <a:pPr lvl="2"/>
             <a:r>
-              <a:rPr lang="pt-BR" smtClean="0"/>
+              <a:rPr lang="pt-BR"/>
               <a:t>Terceiro nível</a:t>
             </a:r>
           </a:p>
           <a:p>
             <a:pPr lvl="3"/>
             <a:r>
-              <a:rPr lang="pt-BR" smtClean="0"/>
+              <a:rPr lang="pt-BR"/>
               <a:t>Quarto nível</a:t>
             </a:r>
           </a:p>
           <a:p>
             <a:pPr lvl="4"/>
             <a:r>
-              <a:rPr lang="pt-BR" smtClean="0"/>
+              <a:rPr lang="pt-BR"/>
               <a:t>Quinto nível</a:t>
             </a:r>
             <a:endParaRPr lang="en-US" dirty="0"/>
@@ -3886,7 +3886,7 @@
           <a:p>
             <a:fld id="{1C5E47A1-8007-4E5F-A68B-E6F49FDD3CAA}" type="datetimeFigureOut">
               <a:rPr lang="pt-BR" smtClean="0"/>
-              <a:t>25/02/2026</a:t>
+              <a:t>26/02/2026</a:t>
             </a:fld>
             <a:endParaRPr lang="pt-BR"/>
           </a:p>
@@ -3984,7 +3984,7 @@
           </a:lstStyle>
           <a:p>
             <a:r>
-              <a:rPr lang="pt-BR" smtClean="0"/>
+              <a:rPr lang="pt-BR"/>
               <a:t>Clique para editar o título mestre</a:t>
             </a:r>
             <a:endParaRPr lang="en-US" dirty="0"/>
@@ -4056,7 +4056,7 @@
           <a:p>
             <a:pPr lvl="0"/>
             <a:r>
-              <a:rPr lang="pt-BR" smtClean="0"/>
+              <a:rPr lang="pt-BR"/>
               <a:t>Editar estilos de texto Mestre</a:t>
             </a:r>
           </a:p>
@@ -4114,35 +4114,35 @@
           <a:p>
             <a:pPr lvl="0"/>
             <a:r>
-              <a:rPr lang="pt-BR" smtClean="0"/>
+              <a:rPr lang="pt-BR"/>
               <a:t>Editar estilos de texto Mestre</a:t>
             </a:r>
           </a:p>
           <a:p>
             <a:pPr lvl="1"/>
             <a:r>
-              <a:rPr lang="pt-BR" smtClean="0"/>
+              <a:rPr lang="pt-BR"/>
               <a:t>Segundo nível</a:t>
             </a:r>
           </a:p>
           <a:p>
             <a:pPr lvl="2"/>
             <a:r>
-              <a:rPr lang="pt-BR" smtClean="0"/>
+              <a:rPr lang="pt-BR"/>
               <a:t>Terceiro nível</a:t>
             </a:r>
           </a:p>
           <a:p>
             <a:pPr lvl="3"/>
             <a:r>
-              <a:rPr lang="pt-BR" smtClean="0"/>
+              <a:rPr lang="pt-BR"/>
               <a:t>Quarto nível</a:t>
             </a:r>
           </a:p>
           <a:p>
             <a:pPr lvl="4"/>
             <a:r>
-              <a:rPr lang="pt-BR" smtClean="0"/>
+              <a:rPr lang="pt-BR"/>
               <a:t>Quinto nível</a:t>
             </a:r>
             <a:endParaRPr lang="en-US" dirty="0"/>
@@ -4214,7 +4214,7 @@
           <a:p>
             <a:pPr lvl="0"/>
             <a:r>
-              <a:rPr lang="pt-BR" smtClean="0"/>
+              <a:rPr lang="pt-BR"/>
               <a:t>Editar estilos de texto Mestre</a:t>
             </a:r>
           </a:p>
@@ -4272,35 +4272,35 @@
           <a:p>
             <a:pPr lvl="0"/>
             <a:r>
-              <a:rPr lang="pt-BR" smtClean="0"/>
+              <a:rPr lang="pt-BR"/>
               <a:t>Editar estilos de texto Mestre</a:t>
             </a:r>
           </a:p>
           <a:p>
             <a:pPr lvl="1"/>
             <a:r>
-              <a:rPr lang="pt-BR" smtClean="0"/>
+              <a:rPr lang="pt-BR"/>
               <a:t>Segundo nível</a:t>
             </a:r>
           </a:p>
           <a:p>
             <a:pPr lvl="2"/>
             <a:r>
-              <a:rPr lang="pt-BR" smtClean="0"/>
+              <a:rPr lang="pt-BR"/>
               <a:t>Terceiro nível</a:t>
             </a:r>
           </a:p>
           <a:p>
             <a:pPr lvl="3"/>
             <a:r>
-              <a:rPr lang="pt-BR" smtClean="0"/>
+              <a:rPr lang="pt-BR"/>
               <a:t>Quarto nível</a:t>
             </a:r>
           </a:p>
           <a:p>
             <a:pPr lvl="4"/>
             <a:r>
-              <a:rPr lang="pt-BR" smtClean="0"/>
+              <a:rPr lang="pt-BR"/>
               <a:t>Quinto nível</a:t>
             </a:r>
             <a:endParaRPr lang="en-US" dirty="0"/>
@@ -4324,7 +4324,7 @@
           <a:p>
             <a:fld id="{1C5E47A1-8007-4E5F-A68B-E6F49FDD3CAA}" type="datetimeFigureOut">
               <a:rPr lang="pt-BR" smtClean="0"/>
-              <a:t>25/02/2026</a:t>
+              <a:t>26/02/2026</a:t>
             </a:fld>
             <a:endParaRPr lang="pt-BR"/>
           </a:p>
@@ -4418,7 +4418,7 @@
           <a:lstStyle/>
           <a:p>
             <a:r>
-              <a:rPr lang="pt-BR" smtClean="0"/>
+              <a:rPr lang="pt-BR"/>
               <a:t>Clique para editar o título mestre</a:t>
             </a:r>
             <a:endParaRPr lang="en-US" dirty="0"/>
@@ -4442,7 +4442,7 @@
           <a:p>
             <a:fld id="{1C5E47A1-8007-4E5F-A68B-E6F49FDD3CAA}" type="datetimeFigureOut">
               <a:rPr lang="pt-BR" smtClean="0"/>
-              <a:t>25/02/2026</a:t>
+              <a:t>26/02/2026</a:t>
             </a:fld>
             <a:endParaRPr lang="pt-BR"/>
           </a:p>
@@ -4537,7 +4537,7 @@
           <a:p>
             <a:fld id="{1C5E47A1-8007-4E5F-A68B-E6F49FDD3CAA}" type="datetimeFigureOut">
               <a:rPr lang="pt-BR" smtClean="0"/>
-              <a:t>25/02/2026</a:t>
+              <a:t>26/02/2026</a:t>
             </a:fld>
             <a:endParaRPr lang="pt-BR"/>
           </a:p>
@@ -4640,7 +4640,7 @@
           </a:lstStyle>
           <a:p>
             <a:r>
-              <a:rPr lang="pt-BR" smtClean="0"/>
+              <a:rPr lang="pt-BR"/>
               <a:t>Clique para editar o título mestre</a:t>
             </a:r>
             <a:endParaRPr lang="en-US" dirty="0"/>
@@ -4699,35 +4699,35 @@
           <a:p>
             <a:pPr lvl="0"/>
             <a:r>
-              <a:rPr lang="pt-BR" smtClean="0"/>
+              <a:rPr lang="pt-BR"/>
               <a:t>Editar estilos de texto Mestre</a:t>
             </a:r>
           </a:p>
           <a:p>
             <a:pPr lvl="1"/>
             <a:r>
-              <a:rPr lang="pt-BR" smtClean="0"/>
+              <a:rPr lang="pt-BR"/>
               <a:t>Segundo nível</a:t>
             </a:r>
           </a:p>
           <a:p>
             <a:pPr lvl="2"/>
             <a:r>
-              <a:rPr lang="pt-BR" smtClean="0"/>
+              <a:rPr lang="pt-BR"/>
               <a:t>Terceiro nível</a:t>
             </a:r>
           </a:p>
           <a:p>
             <a:pPr lvl="3"/>
             <a:r>
-              <a:rPr lang="pt-BR" smtClean="0"/>
+              <a:rPr lang="pt-BR"/>
               <a:t>Quarto nível</a:t>
             </a:r>
           </a:p>
           <a:p>
             <a:pPr lvl="4"/>
             <a:r>
-              <a:rPr lang="pt-BR" smtClean="0"/>
+              <a:rPr lang="pt-BR"/>
               <a:t>Quinto nível</a:t>
             </a:r>
             <a:endParaRPr lang="en-US" dirty="0"/>
@@ -4793,7 +4793,7 @@
           <a:p>
             <a:pPr lvl="0"/>
             <a:r>
-              <a:rPr lang="pt-BR" smtClean="0"/>
+              <a:rPr lang="pt-BR"/>
               <a:t>Editar estilos de texto Mestre</a:t>
             </a:r>
           </a:p>
@@ -4816,7 +4816,7 @@
           <a:p>
             <a:fld id="{1C5E47A1-8007-4E5F-A68B-E6F49FDD3CAA}" type="datetimeFigureOut">
               <a:rPr lang="pt-BR" smtClean="0"/>
-              <a:t>25/02/2026</a:t>
+              <a:t>26/02/2026</a:t>
             </a:fld>
             <a:endParaRPr lang="pt-BR"/>
           </a:p>
@@ -4921,7 +4921,7 @@
           </a:lstStyle>
           <a:p>
             <a:r>
-              <a:rPr lang="pt-BR" smtClean="0"/>
+              <a:rPr lang="pt-BR"/>
               <a:t>Clique para editar o título mestre</a:t>
             </a:r>
             <a:endParaRPr lang="en-US" dirty="0"/>
@@ -5000,7 +5000,7 @@
           </a:lstStyle>
           <a:p>
             <a:r>
-              <a:rPr lang="pt-BR" smtClean="0"/>
+              <a:rPr lang="pt-BR"/>
               <a:t>Clique no ícone para adicionar uma imagem</a:t>
             </a:r>
             <a:endParaRPr lang="en-US" dirty="0"/>
@@ -5068,7 +5068,7 @@
           <a:p>
             <a:pPr lvl="0"/>
             <a:r>
-              <a:rPr lang="pt-BR" smtClean="0"/>
+              <a:rPr lang="pt-BR"/>
               <a:t>Editar estilos de texto Mestre</a:t>
             </a:r>
           </a:p>
@@ -5091,7 +5091,7 @@
           <a:p>
             <a:fld id="{1C5E47A1-8007-4E5F-A68B-E6F49FDD3CAA}" type="datetimeFigureOut">
               <a:rPr lang="pt-BR" smtClean="0"/>
-              <a:t>25/02/2026</a:t>
+              <a:t>26/02/2026</a:t>
             </a:fld>
             <a:endParaRPr lang="pt-BR"/>
           </a:p>
@@ -5415,7 +5415,7 @@
           <a:lstStyle/>
           <a:p>
             <a:r>
-              <a:rPr lang="pt-BR" smtClean="0"/>
+              <a:rPr lang="pt-BR"/>
               <a:t>Clique para editar o título mestre</a:t>
             </a:r>
             <a:endParaRPr lang="en-US" dirty="0"/>
@@ -5449,35 +5449,35 @@
           <a:p>
             <a:pPr lvl="0"/>
             <a:r>
-              <a:rPr lang="pt-BR" smtClean="0"/>
+              <a:rPr lang="pt-BR"/>
               <a:t>Editar estilos de texto Mestre</a:t>
             </a:r>
           </a:p>
           <a:p>
             <a:pPr lvl="1"/>
             <a:r>
-              <a:rPr lang="pt-BR" smtClean="0"/>
+              <a:rPr lang="pt-BR"/>
               <a:t>Segundo nível</a:t>
             </a:r>
           </a:p>
           <a:p>
             <a:pPr lvl="2"/>
             <a:r>
-              <a:rPr lang="pt-BR" smtClean="0"/>
+              <a:rPr lang="pt-BR"/>
               <a:t>Terceiro nível</a:t>
             </a:r>
           </a:p>
           <a:p>
             <a:pPr lvl="3"/>
             <a:r>
-              <a:rPr lang="pt-BR" smtClean="0"/>
+              <a:rPr lang="pt-BR"/>
               <a:t>Quarto nível</a:t>
             </a:r>
           </a:p>
           <a:p>
             <a:pPr lvl="4"/>
             <a:r>
-              <a:rPr lang="pt-BR" smtClean="0"/>
+              <a:rPr lang="pt-BR"/>
               <a:t>Quinto nível</a:t>
             </a:r>
             <a:endParaRPr lang="en-US" dirty="0"/>
@@ -5520,7 +5520,7 @@
           <a:p>
             <a:fld id="{1C5E47A1-8007-4E5F-A68B-E6F49FDD3CAA}" type="datetimeFigureOut">
               <a:rPr lang="pt-BR" smtClean="0"/>
-              <a:t>25/02/2026</a:t>
+              <a:t>26/02/2026</a:t>
             </a:fld>
             <a:endParaRPr lang="pt-BR"/>
           </a:p>
@@ -6055,10 +6055,6 @@
               </a:rPr>
               <a:t>Sistema de Detecção de Anomalias para Monitoramento Ambiental</a:t>
             </a:r>
-            <a:r>
-              <a:rPr lang="pt-BR" sz="1200" dirty="0"/>
-              <a:t/>
-            </a:r>
             <a:br>
               <a:rPr lang="pt-BR" sz="1200" dirty="0"/>
             </a:br>
@@ -6232,13 +6228,6 @@
   <p:clrMapOvr>
     <a:masterClrMapping/>
   </p:clrMapOvr>
-  <p:timing>
-    <p:tnLst>
-      <p:par>
-        <p:cTn id="1" dur="indefinite" restart="never" nodeType="tmRoot"/>
-      </p:par>
-    </p:tnLst>
-  </p:timing>
 </p:sld>
 </file>
 
@@ -6310,13 +6299,6 @@
   <p:clrMapOvr>
     <a:masterClrMapping/>
   </p:clrMapOvr>
-  <p:timing>
-    <p:tnLst>
-      <p:par>
-        <p:cTn id="1" dur="indefinite" restart="never" nodeType="tmRoot"/>
-      </p:par>
-    </p:tnLst>
-  </p:timing>
 </p:sld>
 </file>
 
@@ -6572,42 +6554,7 @@
                 <a:latin typeface="Times New Roman" panose="02020603050405020304" pitchFamily="18" charset="0"/>
                 <a:cs typeface="Times New Roman" panose="02020603050405020304" pitchFamily="18" charset="0"/>
               </a:rPr>
-              <a:t>S</a:t>
-            </a:r>
-            <a:r>
-              <a:rPr lang="pt-BR" sz="1800" dirty="0" smtClean="0">
-                <a:latin typeface="Times New Roman" panose="02020603050405020304" pitchFamily="18" charset="0"/>
-                <a:cs typeface="Times New Roman" panose="02020603050405020304" pitchFamily="18" charset="0"/>
-              </a:rPr>
-              <a:t>ensores </a:t>
-            </a:r>
-            <a:r>
-              <a:rPr lang="pt-BR" sz="1800" dirty="0">
-                <a:latin typeface="Times New Roman" panose="02020603050405020304" pitchFamily="18" charset="0"/>
-                <a:cs typeface="Times New Roman" panose="02020603050405020304" pitchFamily="18" charset="0"/>
-              </a:rPr>
-              <a:t>físicos, sistemas embarcados e algoritmos de </a:t>
-            </a:r>
-            <a:r>
-              <a:rPr lang="pt-BR" sz="1800" dirty="0" smtClean="0">
-                <a:latin typeface="Times New Roman" panose="02020603050405020304" pitchFamily="18" charset="0"/>
-                <a:cs typeface="Times New Roman" panose="02020603050405020304" pitchFamily="18" charset="0"/>
-              </a:rPr>
-              <a:t>ML </a:t>
-            </a:r>
-            <a:r>
-              <a:rPr lang="pt-BR" sz="1800" dirty="0">
-                <a:latin typeface="Times New Roman" panose="02020603050405020304" pitchFamily="18" charset="0"/>
-                <a:cs typeface="Times New Roman" panose="02020603050405020304" pitchFamily="18" charset="0"/>
-              </a:rPr>
-              <a:t>surge como uma alternativa </a:t>
-            </a:r>
-            <a:r>
-              <a:rPr lang="pt-BR" sz="1800" dirty="0" smtClean="0">
-                <a:latin typeface="Times New Roman" panose="02020603050405020304" pitchFamily="18" charset="0"/>
-                <a:cs typeface="Times New Roman" panose="02020603050405020304" pitchFamily="18" charset="0"/>
-              </a:rPr>
-              <a:t>eficiente para o problema.</a:t>
+              <a:t>Sensores físicos, sistemas embarcados e algoritmos de ML surge como uma alternativa eficiente para o problema.</a:t>
             </a:r>
             <a:endParaRPr lang="pt-BR" altLang="pt-BR" sz="1800" dirty="0">
               <a:latin typeface="Times New Roman" panose="02020603050405020304" pitchFamily="18" charset="0"/>
@@ -6656,13 +6603,6 @@
   <p:clrMapOvr>
     <a:masterClrMapping/>
   </p:clrMapOvr>
-  <p:timing>
-    <p:tnLst>
-      <p:par>
-        <p:cTn id="1" dur="indefinite" restart="never" nodeType="tmRoot"/>
-      </p:par>
-    </p:tnLst>
-  </p:timing>
 </p:sld>
 </file>
 
@@ -6890,13 +6830,6 @@
   <p:clrMapOvr>
     <a:masterClrMapping/>
   </p:clrMapOvr>
-  <p:timing>
-    <p:tnLst>
-      <p:par>
-        <p:cTn id="1" dur="indefinite" restart="never" nodeType="tmRoot"/>
-      </p:par>
-    </p:tnLst>
-  </p:timing>
 </p:sld>
 </file>
 
@@ -7146,13 +7079,6 @@
   <p:clrMapOvr>
     <a:masterClrMapping/>
   </p:clrMapOvr>
-  <p:timing>
-    <p:tnLst>
-      <p:par>
-        <p:cTn id="1" dur="indefinite" restart="never" nodeType="tmRoot"/>
-      </p:par>
-    </p:tnLst>
-  </p:timing>
 </p:sld>
 </file>
 
@@ -7519,13 +7445,6 @@
   <p:clrMapOvr>
     <a:masterClrMapping/>
   </p:clrMapOvr>
-  <p:timing>
-    <p:tnLst>
-      <p:par>
-        <p:cTn id="1" dur="indefinite" restart="never" nodeType="tmRoot"/>
-      </p:par>
-    </p:tnLst>
-  </p:timing>
 </p:sld>
 </file>
 
@@ -7783,7 +7702,7 @@
               <a:buSzTx/>
             </a:pPr>
             <a:r>
-              <a:rPr kumimoji="0" lang="pt-BR" altLang="pt-BR" sz="1800" b="0" i="0" u="none" strike="noStrike" cap="none" normalizeH="0" baseline="0" dirty="0" smtClean="0">
+              <a:rPr kumimoji="0" lang="pt-BR" altLang="pt-BR" sz="1800" b="0" i="0" u="none" strike="noStrike" cap="none" normalizeH="0" baseline="0" dirty="0">
                 <a:ln>
                   <a:noFill/>
                 </a:ln>
@@ -7796,17 +7715,6 @@
               </a:rPr>
               <a:t>Padronização dos dados</a:t>
             </a:r>
-            <a:endParaRPr kumimoji="0" lang="pt-BR" altLang="pt-BR" sz="1800" b="0" i="0" u="none" strike="noStrike" cap="none" normalizeH="0" baseline="0" dirty="0">
-              <a:ln>
-                <a:noFill/>
-              </a:ln>
-              <a:solidFill>
-                <a:schemeClr val="tx1"/>
-              </a:solidFill>
-              <a:effectLst/>
-              <a:latin typeface="Times New Roman" panose="02020603050405020304" pitchFamily="18" charset="0"/>
-              <a:cs typeface="Times New Roman" panose="02020603050405020304" pitchFamily="18" charset="0"/>
-            </a:endParaRPr>
           </a:p>
         </p:txBody>
       </p:sp>
@@ -7856,13 +7764,6 @@
   <p:clrMapOvr>
     <a:masterClrMapping/>
   </p:clrMapOvr>
-  <p:timing>
-    <p:tnLst>
-      <p:par>
-        <p:cTn id="1" dur="indefinite" restart="never" nodeType="tmRoot"/>
-      </p:par>
-    </p:tnLst>
-  </p:timing>
 </p:sld>
 </file>
 
@@ -8097,13 +7998,6 @@
   <p:clrMapOvr>
     <a:masterClrMapping/>
   </p:clrMapOvr>
-  <p:timing>
-    <p:tnLst>
-      <p:par>
-        <p:cTn id="1" dur="indefinite" restart="never" nodeType="tmRoot"/>
-      </p:par>
-    </p:tnLst>
-  </p:timing>
 </p:sld>
 </file>
 
@@ -8442,13 +8336,6 @@
   <p:clrMapOvr>
     <a:masterClrMapping/>
   </p:clrMapOvr>
-  <p:timing>
-    <p:tnLst>
-      <p:par>
-        <p:cTn id="1" dur="indefinite" restart="never" nodeType="tmRoot"/>
-      </p:par>
-    </p:tnLst>
-  </p:timing>
 </p:sld>
 </file>
 
@@ -8546,31 +8433,24 @@
             </a:r>
           </a:p>
           <a:p>
-            <a:endParaRPr lang="pt-BR" sz="1800" dirty="0" smtClean="0">
-              <a:latin typeface="Times New Roman" panose="02020603050405020304" pitchFamily="18" charset="0"/>
-              <a:cs typeface="Times New Roman" panose="02020603050405020304" pitchFamily="18" charset="0"/>
-            </a:endParaRPr>
-          </a:p>
-          <a:p>
             <a:endParaRPr lang="pt-BR" sz="1800" dirty="0">
               <a:latin typeface="Times New Roman" panose="02020603050405020304" pitchFamily="18" charset="0"/>
               <a:cs typeface="Times New Roman" panose="02020603050405020304" pitchFamily="18" charset="0"/>
             </a:endParaRPr>
           </a:p>
           <a:p>
-            <a:r>
-              <a:rPr lang="pt-BR" sz="1800" dirty="0" smtClean="0">
-                <a:latin typeface="Times New Roman" panose="02020603050405020304" pitchFamily="18" charset="0"/>
-                <a:cs typeface="Times New Roman" panose="02020603050405020304" pitchFamily="18" charset="0"/>
-              </a:rPr>
-              <a:t>A </a:t>
-            </a:r>
+            <a:endParaRPr lang="pt-BR" sz="1800" dirty="0">
+              <a:latin typeface="Times New Roman" panose="02020603050405020304" pitchFamily="18" charset="0"/>
+              <a:cs typeface="Times New Roman" panose="02020603050405020304" pitchFamily="18" charset="0"/>
+            </a:endParaRPr>
+          </a:p>
+          <a:p>
             <a:r>
               <a:rPr lang="pt-BR" sz="1800" dirty="0">
                 <a:latin typeface="Times New Roman" panose="02020603050405020304" pitchFamily="18" charset="0"/>
                 <a:cs typeface="Times New Roman" panose="02020603050405020304" pitchFamily="18" charset="0"/>
               </a:rPr>
-              <a:t>arquitetura em camadas, aliada ao uso do algoritmo </a:t>
+              <a:t>A arquitetura em camadas, aliada ao uso do algoritmo </a:t>
             </a:r>
             <a:r>
               <a:rPr lang="pt-BR" sz="1800" dirty="0" err="1">
@@ -8584,14 +8464,7 @@
                 <a:latin typeface="Times New Roman" panose="02020603050405020304" pitchFamily="18" charset="0"/>
                 <a:cs typeface="Times New Roman" panose="02020603050405020304" pitchFamily="18" charset="0"/>
               </a:rPr>
-              <a:t> Forest, permitiu identificar anomalias de forma eficiente e reduzir falsos positivos</a:t>
-            </a:r>
-            <a:r>
-              <a:rPr lang="pt-BR" sz="1800" dirty="0" smtClean="0">
-                <a:latin typeface="Times New Roman" panose="02020603050405020304" pitchFamily="18" charset="0"/>
-                <a:cs typeface="Times New Roman" panose="02020603050405020304" pitchFamily="18" charset="0"/>
-              </a:rPr>
-              <a:t>.</a:t>
+              <a:t> Forest, permitiu identificar anomalias de forma eficiente e reduzir falsos positivos.</a:t>
             </a:r>
           </a:p>
           <a:p>
@@ -8601,25 +8474,18 @@
             </a:endParaRPr>
           </a:p>
           <a:p>
-            <a:endParaRPr lang="pt-BR" sz="1800" dirty="0" smtClean="0">
+            <a:endParaRPr lang="pt-BR" sz="1800" dirty="0">
               <a:latin typeface="Times New Roman" panose="02020603050405020304" pitchFamily="18" charset="0"/>
               <a:cs typeface="Times New Roman" panose="02020603050405020304" pitchFamily="18" charset="0"/>
             </a:endParaRPr>
           </a:p>
           <a:p>
-            <a:r>
-              <a:rPr lang="pt-BR" sz="1800" dirty="0" smtClean="0">
-                <a:latin typeface="Times New Roman" panose="02020603050405020304" pitchFamily="18" charset="0"/>
-                <a:cs typeface="Times New Roman" panose="02020603050405020304" pitchFamily="18" charset="0"/>
-              </a:rPr>
-              <a:t>Os </a:t>
-            </a:r>
             <a:r>
               <a:rPr lang="pt-BR" sz="1800" dirty="0">
                 <a:latin typeface="Times New Roman" panose="02020603050405020304" pitchFamily="18" charset="0"/>
                 <a:cs typeface="Times New Roman" panose="02020603050405020304" pitchFamily="18" charset="0"/>
               </a:rPr>
-              <a:t>resultados confirmam o potencial da solução para aplicações práticas em ambientes que exigem monitoramento contínuo de variáveis críticas.</a:t>
+              <a:t>Os resultados confirmam o potencial da solução para aplicações práticas em ambientes que exigem monitoramento contínuo de variáveis críticas.</a:t>
             </a:r>
           </a:p>
           <a:p>
@@ -8640,13 +8506,6 @@
   <p:clrMapOvr>
     <a:masterClrMapping/>
   </p:clrMapOvr>
-  <p:timing>
-    <p:tnLst>
-      <p:par>
-        <p:cTn id="1" dur="indefinite" restart="never" nodeType="tmRoot"/>
-      </p:par>
-    </p:tnLst>
-  </p:timing>
 </p:sld>
 </file>
 
